--- a/docs/proposal/local_llm_proposal_v3.pptx
+++ b/docs/proposal/local_llm_proposal_v3.pptx
@@ -114,42 +114,42 @@
   <p:extLst>
     <p:ext uri="{521415D9-36F7-43E2-AB2F-B90AF26B5E84}">
       <p14:sectionLst xmlns:p14="http://schemas.microsoft.com/office/powerpoint/2010/main">
-        <p14:section name="表紙" id="{d92808bb-7e9c-1d77-1b1e-c16d82e7893a}">
+        <p14:section name="表紙" id="{12b875dc-70aa-f030-a4a1-cdc43a9fa309}">
           <p14:sldIdLst>
             <p14:sldId id="256"/>
           </p14:sldIdLst>
         </p14:section>
-        <p14:section name="01. エグゼクティブサマリー" id="{700e5425-d059-9a22-739e-8fa1aa2daaec}">
+        <p14:section name="01. エグゼクティブサマリー" id="{b360fdd3-fe58-9d17-160f-5c429bf35dcc}">
           <p14:sldIdLst>
             <p14:sldId id="257"/>
           </p14:sldIdLst>
         </p14:section>
-        <p14:section name="02. ローカルLLM比較" id="{cd46f8ee-b485-854e-3e3f-e228aadeb872}">
+        <p14:section name="02. ローカルLLM比較" id="{088d9503-3472-6fe0-4a7c-1e18f14d1155}">
           <p14:sldIdLst>
             <p14:sldId id="258"/>
           </p14:sldIdLst>
         </p14:section>
-        <p14:section name="03. 推奨PC・ハードウェア構成（デスクトップ）" id="{aafc33f4-1f64-05a2-eb19-c479d133f8f3}">
+        <p14:section name="03. 推奨PC・ハードウェア構成（デスクトップ）" id="{a7c3b114-6acf-6680-99c1-88b3ea7a7edf}">
           <p14:sldIdLst>
             <p14:sldId id="259"/>
           </p14:sldIdLst>
         </p14:section>
-        <p14:section name="04. ノートPC構成（オプション）" id="{8beae6ae-844e-2eb3-ec74-3dfe03ed2de8}">
+        <p14:section name="04. ノートPC構成（オプション）" id="{ae3705c9-ba5b-ebea-88b7-476d0bd10f45}">
           <p14:sldIdLst>
             <p14:sldId id="260"/>
           </p14:sldIdLst>
         </p14:section>
-        <p14:section name="05. 保守AIチャットUI・システムイメージ" id="{c639923c-255c-12f1-4590-0467a790326b}">
+        <p14:section name="05. 保守AIチャットUI・システムイメージ" id="{14cc9188-6525-698b-7226-d3efd048643f}">
           <p14:sldIdLst>
             <p14:sldId id="261"/>
           </p14:sldIdLst>
         </p14:section>
-        <p14:section name="06. 概算費用および導入スケジュール" id="{5e7d6e11-9f27-5a30-51d6-f5dcefcc6429}">
+        <p14:section name="06. 概算費用および導入スケジュール" id="{f9ee9c1b-6326-cab7-7a7c-f2124b0a9a76}">
           <p14:sldIdLst>
             <p14:sldId id="262"/>
           </p14:sldIdLst>
         </p14:section>
-        <p14:section name="07. 本提案の優位性と期待効果" id="{4a2d1300-0a09-fad3-c8b9-ab64b15d641e}">
+        <p14:section name="07. 本提案の優位性と期待効果" id="{72b7269f-3227-037a-ab01-34ed324e2308}">
           <p14:sldIdLst>
             <p14:sldId id="263"/>
           </p14:sldIdLst>
@@ -646,7 +646,7 @@
           <a:p>
             <a:r>
               <a:rPr lang="en-US" dirty="0"/>
-              <a:t>社内で完結する安全かつ高速なAI保守支援基盤</a:t>
+              <a:t>閉域ネットワーク内で完結する安全かつ高速なAI保守支援基盤</a:t>
             </a:r>
             <a:endParaRPr lang="en-US" dirty="0"/>
           </a:p>
@@ -822,7 +822,7 @@
           <a:p>
             <a:r>
               <a:rPr lang="en-US" dirty="0"/>
-              <a:t>PC購入予算70万円以内で選べる2つの構成案</a:t>
+              <a:t>PC購入予算70万円以内で選べるAI専用PCの2つの構成案</a:t>
             </a:r>
             <a:endParaRPr lang="en-US" dirty="0"/>
           </a:p>
@@ -998,7 +998,7 @@
           <a:p>
             <a:r>
               <a:rPr lang="en-US" dirty="0"/>
-              <a:t>ブラウザで直感的に使える保守チャットインターフェース</a:t>
+              <a:t>社内LANの各端末からブラウザで使える保守チャットインターフェース</a:t>
             </a:r>
             <a:endParaRPr lang="en-US" dirty="0"/>
           </a:p>
@@ -1636,7 +1636,7 @@
                 <a:ea typeface="Meiryo" pitchFamily="34" charset="-122"/>
                 <a:cs typeface="Meiryo" pitchFamily="34" charset="-120"/>
               </a:rPr>
-              <a:t>インターネット非接続のローカルLLM環境構築 提案書</a:t>
+              <a:t>外部ネットワークと遮断された閉域ネットワーク内で、社内LANから利用するローカルLLM環境の構築提案</a:t>
             </a:r>
             <a:endParaRPr lang="en-US" sz="1700" dirty="0"/>
           </a:p>
@@ -1698,7 +1698,7 @@
                 <a:ea typeface="Meiryo" pitchFamily="34" charset="-122"/>
                 <a:cs typeface="Meiryo" pitchFamily="34" charset="-120"/>
               </a:rPr>
-              <a:t>欧米オープンモデル選定（商用ライセンス確認済み） | PC購入予算70万円以内の構成 | 保守チャットUI | 導入概算費用</a:t>
+              <a:t>欧米オープンモデル選定（商用ライセンス確認済み） | PC購入予算70万円以内の構成 | 社内LANから使える保守チャットUI | 導入概算費用</a:t>
             </a:r>
             <a:endParaRPr lang="en-US" sz="1200" dirty="0"/>
           </a:p>
@@ -1810,7 +1810,7 @@
                 <a:ea typeface="Meiryo" pitchFamily="34" charset="-122"/>
                 <a:cs typeface="Meiryo" pitchFamily="34" charset="-120"/>
               </a:rPr>
-              <a:t>社内で完結する安全かつ高速なAI保守支援基盤</a:t>
+              <a:t>閉域ネットワーク内で完結する安全かつ高速なAI保守支援基盤</a:t>
             </a:r>
             <a:endParaRPr lang="en-US" sz="2200" dirty="0"/>
           </a:p>
@@ -1849,7 +1849,7 @@
                 <a:ea typeface="Meiryo" pitchFamily="34" charset="-122"/>
                 <a:cs typeface="Meiryo" pitchFamily="34" charset="-120"/>
               </a:rPr>
-              <a:t>インターネット非接続の専用PCにローカルLLMを構築し、エラーログ解析の一次対応を支援します</a:t>
+              <a:t>外部ネットワークと遮断された社内LANにAI専用PCを設置し、各担当者のブラウザからエラーログ解析の一次対応を支援します</a:t>
             </a:r>
             <a:endParaRPr lang="en-US" sz="1100" dirty="0"/>
           </a:p>
@@ -1961,7 +1961,7 @@
                 <a:ea typeface="Meiryo" pitchFamily="34" charset="-122"/>
                 <a:cs typeface="Meiryo" pitchFamily="34" charset="-120"/>
               </a:rPr>
-              <a:t>完全オフライン運用</a:t>
+              <a:t>閉域ネットワーク内での運用</a:t>
             </a:r>
             <a:endParaRPr lang="en-US" sz="1400" dirty="0"/>
           </a:p>
@@ -2043,7 +2043,7 @@
                 <a:ea typeface="Meiryo" pitchFamily="34" charset="-122"/>
                 <a:cs typeface="Meiryo" pitchFamily="34" charset="-120"/>
               </a:rPr>
-              <a:t>インターネットに接続しない専用PCにローカルLLMを構築。スタンドアロン運用、または社内LAN内のみで共有する運用を選択可能</a:t>
+              <a:t>外部ネットワークと遮断された社内LAN内にAI専用PCを設置し、LAN内の端末からのみ利用</a:t>
             </a:r>
             <a:endParaRPr lang="en-US" sz="1150" dirty="0"/>
           </a:p>
@@ -2064,7 +2064,7 @@
                 <a:ea typeface="Meiryo" pitchFamily="34" charset="-122"/>
                 <a:cs typeface="Meiryo" pitchFamily="34" charset="-120"/>
               </a:rPr>
-              <a:t>機密ログ・ソースコード・障害データの外部ネットワークへの送信リスクを排除</a:t>
+              <a:t>推論もデータ保存もLAN内で完結し、機密ログ・ソースコード・障害データが外部ネットワークへ出ない</a:t>
             </a:r>
             <a:endParaRPr lang="en-US" sz="1150" dirty="0"/>
           </a:p>
@@ -2085,7 +2085,7 @@
                 <a:ea typeface="Meiryo" pitchFamily="34" charset="-122"/>
                 <a:cs typeface="Meiryo" pitchFamily="34" charset="-120"/>
               </a:rPr>
-              <a:t>OSのファイアウォール設定と無線無効化で外部通信を遮断し、社内セキュリティポリシーに準拠</a:t>
+              <a:t>固定IP・LAN内アドレスのみ許可するファイアウォール設定と無線無効化で、社内セキュリティポリシーに準拠</a:t>
             </a:r>
             <a:endParaRPr lang="en-US" sz="1150" dirty="0"/>
           </a:p>
@@ -2430,7 +2430,7 @@
         <p:spPr>
           <a:xfrm>
             <a:off x="8249717" y="2350008"/>
-            <a:ext cx="3247034" cy="1343025"/>
+            <a:ext cx="3247034" cy="1540193"/>
           </a:xfrm>
           <a:prstGeom prst="rect">
             <a:avLst/>
@@ -2479,7 +2479,7 @@
                 <a:ea typeface="Meiryo" pitchFamily="34" charset="-122"/>
                 <a:cs typeface="Meiryo" pitchFamily="34" charset="-120"/>
               </a:rPr>
-              <a:t>ブラウザから使える保守チャットWebUIをキッティングして納品</a:t>
+              <a:t>社内LANの各端末からブラウザで使える保守チャットWebUIをキッティングして納品（利用者ごとのアカウント発行）</a:t>
             </a:r>
             <a:endParaRPr lang="en-US" sz="1150" dirty="0"/>
           </a:p>
@@ -5458,7 +5458,7 @@
                 <a:ea typeface="Meiryo" pitchFamily="34" charset="-122"/>
                 <a:cs typeface="Meiryo" pitchFamily="34" charset="-120"/>
               </a:rPr>
-              <a:t>PC購入予算70万円以内で選べる2つの構成案</a:t>
+              <a:t>PC購入予算70万円以内で選べるAI専用PCの2つの構成案</a:t>
             </a:r>
             <a:endParaRPr lang="en-US" sz="2200" dirty="0"/>
           </a:p>
@@ -5575,7 +5575,7 @@
                 <a:ea typeface="Meiryo" pitchFamily="34" charset="-122"/>
                 <a:cs typeface="Meiryo" pitchFamily="34" charset="-120"/>
               </a:rPr>
-              <a:t>※ オフライン仕様：Wi-Fi / Bluetoothの無効化、OSファイアウォールによる外部通信遮断（社内LAN共有時はLAN内アドレスのみ許可）、自動更新・テレメトリの停止を行って納品します。RTX 4090 / 4070 Ti Super は生産終了のため選定対象外です。</a:t>
+              <a:t>※ 閉域ネットワーク仕様：有線LANのみ使用（Wi-Fi / Bluetooth無効化）、固定IP、OSファイアウォールでLAN内アドレスからのWebUIアクセスのみ許可、自動更新・テレメトリの停止を行って納品します。数名規模の同時利用なら1台で対応でき、同時リクエストは順次処理されます。RTX 4090 / 4070 Ti Super は生産終了のため選定対象外です。</a:t>
             </a:r>
             <a:endParaRPr lang="en-US" sz="900" dirty="0"/>
           </a:p>
@@ -6562,7 +6562,7 @@
                 <a:ea typeface="Meiryo" pitchFamily="34" charset="-122"/>
                 <a:cs typeface="Meiryo" pitchFamily="34" charset="-120"/>
               </a:rPr>
-              <a:t>ノートPCはGPU 2枚構成が組めないためVRAM上限は24GB。同じ予算ではデスクトップより一段階下の性能になります</a:t>
+              <a:t>ノートPCをLAN内のAIサーバーとして使う構成。GPU 2枚構成が組めないためVRAM上限は24GBで、同じ予算ではデスクトップより一段階下の性能になります</a:t>
             </a:r>
             <a:endParaRPr lang="en-US" sz="1100" dirty="0"/>
           </a:p>
@@ -8066,11 +8066,11 @@
         <p:spPr>
           <a:xfrm>
             <a:off x="530352" y="4403598"/>
-            <a:ext cx="5464912" cy="1609344"/>
+            <a:ext cx="5464912" cy="1806512"/>
           </a:xfrm>
           <a:prstGeom prst="roundRect">
             <a:avLst>
-              <a:gd name="adj" fmla="val 5682"/>
+              <a:gd name="adj" fmla="val 5062"/>
             </a:avLst>
           </a:prstGeom>
           <a:solidFill>
@@ -8224,11 +8224,11 @@
         <p:spPr>
           <a:xfrm>
             <a:off x="6196432" y="4403598"/>
-            <a:ext cx="5464912" cy="1609344"/>
+            <a:ext cx="5464912" cy="1806512"/>
           </a:xfrm>
           <a:prstGeom prst="roundRect">
             <a:avLst>
-              <a:gd name="adj" fmla="val 5682"/>
+              <a:gd name="adj" fmla="val 5062"/>
             </a:avLst>
           </a:prstGeom>
           <a:solidFill>
@@ -8297,7 +8297,7 @@
         <p:spPr>
           <a:xfrm>
             <a:off x="6361024" y="4899660"/>
-            <a:ext cx="5135728" cy="948690"/>
+            <a:ext cx="5135728" cy="1145858"/>
           </a:xfrm>
           <a:prstGeom prst="rect">
             <a:avLst/>
@@ -8367,7 +8367,7 @@
                 <a:ea typeface="Meiryo" pitchFamily="34" charset="-122"/>
                 <a:cs typeface="Meiryo" pitchFamily="34" charset="-120"/>
               </a:rPr>
-              <a:t>AC接続時に最大性能・スリープ無効の電源設定</a:t>
+              <a:t>AC接続時に最大性能・スリープ無効・蓋を閉じても稼働する電源設定（常時稼働のサーバー用途のため）</a:t>
             </a:r>
             <a:endParaRPr lang="en-US" sz="1150" dirty="0"/>
           </a:p>
@@ -8479,7 +8479,7 @@
                 <a:ea typeface="Meiryo" pitchFamily="34" charset="-122"/>
                 <a:cs typeface="Meiryo" pitchFamily="34" charset="-120"/>
               </a:rPr>
-              <a:t>ブラウザで直感的に使える保守チャットインターフェース</a:t>
+              <a:t>社内LANの各端末からブラウザで使える保守チャットインターフェース</a:t>
             </a:r>
             <a:endParaRPr lang="en-US" sz="2200" dirty="0"/>
           </a:p>
@@ -8518,7 +8518,7 @@
                 <a:ea typeface="Meiryo" pitchFamily="34" charset="-122"/>
                 <a:cs typeface="Meiryo" pitchFamily="34" charset="-120"/>
               </a:rPr>
-              <a:t>推論エンジン（Ollama）とWebUI（Open WebUI）を納品PCに構築済み。利用者側の追加ソフト導入は不要です</a:t>
+              <a:t>推論エンジン（Ollama）とWebUI（Open WebUI）をAI専用PCに構築済み。利用者の端末には追加ソフト導入不要で、既存のブラウザからアクセスします</a:t>
             </a:r>
             <a:endParaRPr lang="en-US" sz="1100" dirty="0"/>
           </a:p>
@@ -8662,7 +8662,7 @@
                 <a:ea typeface="Meiryo" pitchFamily="34" charset="-122"/>
                 <a:cs typeface="Meiryo" pitchFamily="34" charset="-120"/>
               </a:rPr>
-              <a:t>[完全オフライン] 保守AIアシスタント（Gemma 4）</a:t>
+              <a:t>[閉域ネットワーク内] 保守AIアシスタント（Gemma 4）</a:t>
             </a:r>
             <a:endParaRPr lang="en-US" sz="900" dirty="0"/>
           </a:p>
@@ -9170,7 +9170,7 @@
                 <a:ea typeface="Meiryo" pitchFamily="34" charset="-122"/>
                 <a:cs typeface="Meiryo" pitchFamily="34" charset="-120"/>
               </a:rPr>
-              <a:t>ブラウザ接続（ローカル / 社内LAN）</a:t>
+              <a:t>社内LANからのブラウザ接続</a:t>
             </a:r>
             <a:endParaRPr lang="en-US" sz="1250" dirty="0"/>
           </a:p>
@@ -9213,7 +9213,7 @@
                 <a:ea typeface="Meiryo" pitchFamily="34" charset="-122"/>
                 <a:cs typeface="Meiryo" pitchFamily="34" charset="-120"/>
               </a:rPr>
-              <a:t>PC起動後、ブラウザを開くだけで利用可能。社内LAN共有時は複数の担当者が同じ環境を利用でき、Open WebUIは社内利用・50ユーザー以下を想定</a:t>
+              <a:t>AI専用PCのLAN内アドレスにブラウザでアクセスするだけで利用可能。利用者ごとのアカウントと会話履歴を管理（Open WebUIは社内利用・50ユーザー以下を想定）</a:t>
             </a:r>
             <a:endParaRPr lang="en-US" sz="1000" dirty="0"/>
           </a:p>
@@ -9402,7 +9402,7 @@
                 <a:ea typeface="Meiryo" pitchFamily="34" charset="-122"/>
                 <a:cs typeface="Meiryo" pitchFamily="34" charset="-120"/>
               </a:rPr>
-              <a:t>インターネット非接続構成</a:t>
+              <a:t>外部ネットワークと遮断された構成</a:t>
             </a:r>
             <a:endParaRPr lang="en-US" sz="1250" dirty="0"/>
           </a:p>
@@ -9445,7 +9445,7 @@
                 <a:ea typeface="Meiryo" pitchFamily="34" charset="-122"/>
                 <a:cs typeface="Meiryo" pitchFamily="34" charset="-120"/>
               </a:rPr>
-              <a:t>推論・データ保存はすべてPC内で完結。外部サーバーへの送信経路を持たないため、インターネット経由の情報漏洩リスクを排除</a:t>
+              <a:t>通信はLAN内の端末とAI専用PCの間のみ。外部サーバーへの送信経路を持たないため、外部ネットワーク経由の情報漏洩リスクを排除</a:t>
             </a:r>
             <a:endParaRPr lang="en-US" sz="1000" dirty="0"/>
           </a:p>
@@ -10277,7 +10277,7 @@
                           <a:ea typeface="Meiryo" pitchFamily="34" charset="-122"/>
                           <a:cs typeface="Meiryo" pitchFamily="34" charset="-120"/>
                         </a:rPr>
-                        <a:t>OSセキュリティ設定（外部通信遮断・無線無効化）、推論エンジン（Ollama）とWebUI組み込み、モデルファイルのハッシュ検証、オフライン動作検証</a:t>
+                        <a:t>OSセキュリティ設定（固定IP・LAN内アクセス制限・無線無効化）、推論エンジン（Ollama）とWebUI組み込み、利用者アカウント設定、モデルファイルのハッシュ検証、閉域環境での動作検証</a:t>
                       </a:r>
                       <a:endParaRPr lang="en-US" sz="1050" dirty="0">
                         <a:latin typeface="Meiryo" charset="0"/>
@@ -10603,7 +10603,7 @@
                   </a:tcPr>
                 </a:tc>
               </a:tr>
-              <a:tr h="319659">
+              <a:tr h="493014">
                 <a:tc>
                   <a:txBody>
                     <a:bodyPr/>
@@ -10689,7 +10689,7 @@
                           <a:ea typeface="Meiryo" pitchFamily="34" charset="-122"/>
                           <a:cs typeface="Meiryo" pitchFamily="34" charset="-120"/>
                         </a:rPr>
-                        <a:t>現地設置・社内LAN接続設定（共有運用時）、取扱説明書・モデル更新手順書作成、運用レクチャー</a:t>
+                        <a:t>現地設置・社内LAN接続設定、各端末からの接続確認、取扱説明書・モデル更新手順書作成、運用レクチャー</a:t>
                       </a:r>
                       <a:endParaRPr lang="en-US" sz="1050" dirty="0">
                         <a:latin typeface="Meiryo" charset="0"/>
@@ -10821,7 +10821,7 @@
         </p:nvSpPr>
         <p:spPr>
           <a:xfrm>
-            <a:off x="530352" y="3883533"/>
+            <a:off x="530352" y="4056888"/>
             <a:ext cx="11130991" cy="566928"/>
           </a:xfrm>
           <a:prstGeom prst="roundRect">
@@ -10848,7 +10848,7 @@
         </p:nvSpPr>
         <p:spPr>
           <a:xfrm>
-            <a:off x="713232" y="3883533"/>
+            <a:off x="713232" y="4056888"/>
             <a:ext cx="10765231" cy="566928"/>
           </a:xfrm>
           <a:prstGeom prst="rect">
@@ -10901,7 +10901,7 @@
         </p:nvSpPr>
         <p:spPr>
           <a:xfrm>
-            <a:off x="530352" y="4615053"/>
+            <a:off x="530352" y="4788408"/>
             <a:ext cx="2138416" cy="1005840"/>
           </a:xfrm>
           <a:prstGeom prst="roundRect">
@@ -10928,7 +10928,7 @@
         </p:nvSpPr>
         <p:spPr>
           <a:xfrm>
-            <a:off x="621792" y="4688205"/>
+            <a:off x="621792" y="4861560"/>
             <a:ext cx="1955536" cy="859536"/>
           </a:xfrm>
           <a:prstGeom prst="rect">
@@ -10984,7 +10984,7 @@
         </p:nvSpPr>
         <p:spPr>
           <a:xfrm>
-            <a:off x="2778496" y="4615053"/>
+            <a:off x="2778496" y="4788408"/>
             <a:ext cx="2138416" cy="1005840"/>
           </a:xfrm>
           <a:prstGeom prst="roundRect">
@@ -11011,7 +11011,7 @@
         </p:nvSpPr>
         <p:spPr>
           <a:xfrm>
-            <a:off x="2869936" y="4688205"/>
+            <a:off x="2869936" y="4861560"/>
             <a:ext cx="1955536" cy="859536"/>
           </a:xfrm>
           <a:prstGeom prst="rect">
@@ -11067,7 +11067,7 @@
         </p:nvSpPr>
         <p:spPr>
           <a:xfrm>
-            <a:off x="5026640" y="4615053"/>
+            <a:off x="5026640" y="4788408"/>
             <a:ext cx="2138416" cy="1005840"/>
           </a:xfrm>
           <a:prstGeom prst="roundRect">
@@ -11094,7 +11094,7 @@
         </p:nvSpPr>
         <p:spPr>
           <a:xfrm>
-            <a:off x="5118080" y="4688205"/>
+            <a:off x="5118080" y="4861560"/>
             <a:ext cx="1955536" cy="859536"/>
           </a:xfrm>
           <a:prstGeom prst="rect">
@@ -11136,7 +11136,7 @@
                 <a:ea typeface="Meiryo" pitchFamily="34" charset="-122"/>
                 <a:cs typeface="Meiryo" pitchFamily="34" charset="-120"/>
               </a:rPr>
-              <a:t>納品PCへのキッティング・オフライン設定</a:t>
+              <a:t>納品PCへのキッティング・LAN内アクセス設定</a:t>
             </a:r>
             <a:endParaRPr lang="en-US" sz="1000" dirty="0"/>
           </a:p>
@@ -11150,7 +11150,7 @@
         </p:nvSpPr>
         <p:spPr>
           <a:xfrm>
-            <a:off x="7274784" y="4615053"/>
+            <a:off x="7274784" y="4788408"/>
             <a:ext cx="2138416" cy="1005840"/>
           </a:xfrm>
           <a:prstGeom prst="roundRect">
@@ -11177,7 +11177,7 @@
         </p:nvSpPr>
         <p:spPr>
           <a:xfrm>
-            <a:off x="7366224" y="4688205"/>
+            <a:off x="7366224" y="4861560"/>
             <a:ext cx="1955536" cy="859536"/>
           </a:xfrm>
           <a:prstGeom prst="rect">
@@ -11233,7 +11233,7 @@
         </p:nvSpPr>
         <p:spPr>
           <a:xfrm>
-            <a:off x="9522927" y="4615053"/>
+            <a:off x="9522927" y="4788408"/>
             <a:ext cx="2138416" cy="1005840"/>
           </a:xfrm>
           <a:prstGeom prst="roundRect">
@@ -11260,7 +11260,7 @@
         </p:nvSpPr>
         <p:spPr>
           <a:xfrm>
-            <a:off x="9614367" y="4688205"/>
+            <a:off x="9614367" y="4861560"/>
             <a:ext cx="1955536" cy="859536"/>
           </a:xfrm>
           <a:prstGeom prst="rect">
@@ -11302,7 +11302,7 @@
                 <a:ea typeface="Meiryo" pitchFamily="34" charset="-122"/>
                 <a:cs typeface="Meiryo" pitchFamily="34" charset="-120"/>
               </a:rPr>
-              <a:t>現地設置・運用レクチャー</a:t>
+              <a:t>現地設置・各端末からの接続確認・運用レクチャー</a:t>
             </a:r>
             <a:endParaRPr lang="en-US" sz="1000" dirty="0"/>
           </a:p>
@@ -11453,7 +11453,7 @@
                 <a:ea typeface="Meiryo" pitchFamily="34" charset="-122"/>
                 <a:cs typeface="Meiryo" pitchFamily="34" charset="-120"/>
               </a:rPr>
-              <a:t>クラウドAIでは実現しにくい「データを外に出さない」運用を、固定費で実現します</a:t>
+              <a:t>クラウドAIでは実現しにくい「データを社内LANの外に出さない」運用を、固定費で実現します</a:t>
             </a:r>
             <a:endParaRPr lang="en-US" sz="1100" dirty="0"/>
           </a:p>
@@ -11622,7 +11622,7 @@
                 <a:ea typeface="Meiryo" pitchFamily="34" charset="-122"/>
                 <a:cs typeface="Meiryo" pitchFamily="34" charset="-120"/>
               </a:rPr>
-              <a:t>外部送信リスクの排除（セキュリティ強化）</a:t>
+              <a:t>外部ネットワークへの送信リスクの排除（セキュリティ強化）</a:t>
             </a:r>
             <a:endParaRPr lang="en-US" sz="1400" dirty="0"/>
           </a:p>
@@ -11686,7 +11686,7 @@
                 <a:ea typeface="Meiryo" pitchFamily="34" charset="-122"/>
                 <a:cs typeface="Meiryo" pitchFamily="34" charset="-120"/>
               </a:rPr>
-              <a:t>インターネット非接続のため、クラウドAI利用時に必要なデータ送信先の審査が不要。監査対応の説明が容易</a:t>
+              <a:t>外部ネットワークと遮断された閉域構成のため、クラウドAI利用時に必要なデータ送信先の審査が不要。監査対応の説明が容易</a:t>
             </a:r>
             <a:endParaRPr lang="en-US" sz="1150" dirty="0"/>
           </a:p>
@@ -11859,7 +11859,7 @@
                 <a:ea typeface="Meiryo" pitchFamily="34" charset="-122"/>
                 <a:cs typeface="Meiryo" pitchFamily="34" charset="-120"/>
               </a:rPr>
-              <a:t>API従量課金や月額サブスクリプション費用が発生せず、初期費用のみで24時間365日利用可能</a:t>
+              <a:t>API従量課金や月額サブスクリプション費用が発生せず、初期費用のみで社内LAN内の担当者が24時間365日利用可能</a:t>
             </a:r>
             <a:endParaRPr lang="en-US" sz="1150" dirty="0"/>
           </a:p>

--- a/docs/proposal/local_llm_proposal_v3.pptx
+++ b/docs/proposal/local_llm_proposal_v3.pptx
@@ -114,42 +114,42 @@
   <p:extLst>
     <p:ext uri="{521415D9-36F7-43E2-AB2F-B90AF26B5E84}">
       <p14:sectionLst xmlns:p14="http://schemas.microsoft.com/office/powerpoint/2010/main">
-        <p14:section name="表紙" id="{12b875dc-70aa-f030-a4a1-cdc43a9fa309}">
+        <p14:section name="表紙" id="{3bcbe261-b543-3ae4-1a52-d8cc18a6316a}">
           <p14:sldIdLst>
             <p14:sldId id="256"/>
           </p14:sldIdLst>
         </p14:section>
-        <p14:section name="01. エグゼクティブサマリー" id="{b360fdd3-fe58-9d17-160f-5c429bf35dcc}">
+        <p14:section name="01. エグゼクティブサマリー" id="{ab4d9cf7-1605-d03f-7e70-5be4ff37c3a6}">
           <p14:sldIdLst>
             <p14:sldId id="257"/>
           </p14:sldIdLst>
         </p14:section>
-        <p14:section name="02. ローカルLLM比較" id="{088d9503-3472-6fe0-4a7c-1e18f14d1155}">
+        <p14:section name="02. ローカルLLM比較" id="{40d3cf26-ec39-9f25-a1b6-be326a95edf4}">
           <p14:sldIdLst>
             <p14:sldId id="258"/>
           </p14:sldIdLst>
         </p14:section>
-        <p14:section name="03. 推奨PC・ハードウェア構成（デスクトップ）" id="{a7c3b114-6acf-6680-99c1-88b3ea7a7edf}">
+        <p14:section name="03. 推奨PC・ハードウェア構成（デスクトップ）" id="{85c388ee-7041-a37c-7352-b70acf202492}">
           <p14:sldIdLst>
             <p14:sldId id="259"/>
           </p14:sldIdLst>
         </p14:section>
-        <p14:section name="04. ノートPC構成（オプション）" id="{ae3705c9-ba5b-ebea-88b7-476d0bd10f45}">
+        <p14:section name="04. ノートPC構成（オプション）" id="{1c4dc6da-0c3e-f877-6600-8c6fe0063efb}">
           <p14:sldIdLst>
             <p14:sldId id="260"/>
           </p14:sldIdLst>
         </p14:section>
-        <p14:section name="05. 保守AIチャットUI・システムイメージ" id="{14cc9188-6525-698b-7226-d3efd048643f}">
+        <p14:section name="05. 保守AIチャットUI・システムイメージ" id="{21e57806-73db-9e40-14dd-fcf0208566d2}">
           <p14:sldIdLst>
             <p14:sldId id="261"/>
           </p14:sldIdLst>
         </p14:section>
-        <p14:section name="06. 概算費用および導入スケジュール" id="{f9ee9c1b-6326-cab7-7a7c-f2124b0a9a76}">
+        <p14:section name="06. 作業内容および導入スケジュール" id="{88f20e6d-95cf-a781-f6dc-9aec69851101}">
           <p14:sldIdLst>
             <p14:sldId id="262"/>
           </p14:sldIdLst>
         </p14:section>
-        <p14:section name="07. 本提案の優位性と期待効果" id="{72b7269f-3227-037a-ab01-34ed324e2308}">
+        <p14:section name="07. 本提案の優位性と期待効果" id="{644801e6-a7d3-75d8-554b-9382d8c18e52}">
           <p14:sldIdLst>
             <p14:sldId id="263"/>
           </p14:sldIdLst>
@@ -822,7 +822,7 @@
           <a:p>
             <a:r>
               <a:rPr lang="en-US" dirty="0"/>
-              <a:t>PC購入予算70万円以内で選べるAI専用PCの2つの構成案</a:t>
+              <a:t>用途に応じて選べるAI専用PCの2つの構成案</a:t>
             </a:r>
             <a:endParaRPr lang="en-US" dirty="0"/>
           </a:p>
@@ -1698,7 +1698,7 @@
                 <a:ea typeface="Meiryo" pitchFamily="34" charset="-122"/>
                 <a:cs typeface="Meiryo" pitchFamily="34" charset="-120"/>
               </a:rPr>
-              <a:t>欧米オープンモデル選定（商用ライセンス確認済み） | PC購入予算70万円以内の構成 | 社内LANから使える保守チャットUI | 導入概算費用</a:t>
+              <a:t>欧米オープンモデル選定（商用ライセンス確認済み） | AI専用PCの構成案 | 社内LANから使える保守チャットUI | 作業内容と導入スケジュール</a:t>
             </a:r>
             <a:endParaRPr lang="en-US" sz="1200" dirty="0"/>
           </a:p>
@@ -2430,7 +2430,7 @@
         <p:spPr>
           <a:xfrm>
             <a:off x="8249717" y="2350008"/>
-            <a:ext cx="3247034" cy="1540193"/>
+            <a:ext cx="3247034" cy="1343025"/>
           </a:xfrm>
           <a:prstGeom prst="rect">
             <a:avLst/>
@@ -2458,7 +2458,7 @@
                 <a:ea typeface="Meiryo" pitchFamily="34" charset="-122"/>
                 <a:cs typeface="Meiryo" pitchFamily="34" charset="-120"/>
               </a:rPr>
-              <a:t>PC購入予算70万円以内で、用途に応じた2つの構成案を提示</a:t>
+              <a:t>用途に応じた2つのAI専用PC構成案を提示</a:t>
             </a:r>
             <a:endParaRPr lang="en-US" sz="1150" dirty="0"/>
           </a:p>
@@ -2500,7 +2500,7 @@
                 <a:ea typeface="Meiryo" pitchFamily="34" charset="-122"/>
                 <a:cs typeface="Meiryo" pitchFamily="34" charset="-120"/>
               </a:rPr>
-              <a:t>導入後すぐに運用を開始可能。年間保守はオプションで提供</a:t>
+              <a:t>作業はトータル1人月の工数で1名をアサインし、導入後すぐに運用を開始可能</a:t>
             </a:r>
             <a:endParaRPr lang="en-US" sz="1150" dirty="0"/>
           </a:p>
@@ -3244,7 +3244,7 @@
                   </a:tcPr>
                 </a:tc>
               </a:tr>
-              <a:tr h="839724">
+              <a:tr h="956310">
                 <a:tc>
                   <a:txBody>
                     <a:bodyPr/>
@@ -3794,7 +3794,7 @@
                   </a:tcPr>
                 </a:tc>
               </a:tr>
-              <a:tr h="666369">
+              <a:tr h="762952">
                 <a:tc>
                   <a:txBody>
                     <a:bodyPr/>
@@ -4320,7 +4320,7 @@
                   </a:tcPr>
                 </a:tc>
               </a:tr>
-              <a:tr h="839724">
+              <a:tr h="956310">
                 <a:tc>
                   <a:txBody>
                     <a:bodyPr/>
@@ -4846,7 +4846,7 @@
                   </a:tcPr>
                 </a:tc>
               </a:tr>
-              <a:tr h="666369">
+              <a:tr h="762952">
                 <a:tc>
                   <a:txBody>
                     <a:bodyPr/>
@@ -5458,7 +5458,7 @@
                 <a:ea typeface="Meiryo" pitchFamily="34" charset="-122"/>
                 <a:cs typeface="Meiryo" pitchFamily="34" charset="-120"/>
               </a:rPr>
-              <a:t>PC購入予算70万円以内で選べるAI専用PCの2つの構成案</a:t>
+              <a:t>用途に応じて選べるAI専用PCの2つの構成案</a:t>
             </a:r>
             <a:endParaRPr lang="en-US" sz="2200" dirty="0"/>
           </a:p>
@@ -5497,7 +5497,7 @@
                 <a:ea typeface="Meiryo" pitchFamily="34" charset="-122"/>
                 <a:cs typeface="Meiryo" pitchFamily="34" charset="-120"/>
               </a:rPr>
-              <a:t>価格は2026年10月時点の国内実勢による概算（税抜）。GPU・DDR5メモリは高騰が続いているため、発注時に再見積します</a:t>
+              <a:t>いずれも現行世代のGPU搭載BTO PCで構成。GPU・DDR5メモリは在庫変動が大きいため、発注時に調達可能な部品で確定します</a:t>
             </a:r>
             <a:endParaRPr lang="en-US" sz="1100" dirty="0"/>
           </a:p>
@@ -5590,11 +5590,11 @@
         <p:spPr>
           <a:xfrm>
             <a:off x="530352" y="1572768"/>
-            <a:ext cx="5464912" cy="3721418"/>
+            <a:ext cx="5464912" cy="3200210"/>
           </a:xfrm>
           <a:prstGeom prst="roundRect">
             <a:avLst>
-              <a:gd name="adj" fmla="val 2457"/>
+              <a:gd name="adj" fmla="val 2857"/>
             </a:avLst>
           </a:prstGeom>
           <a:solidFill>
@@ -5702,45 +5702,6 @@
         <p:spPr>
           <a:xfrm>
             <a:off x="694944" y="2350008"/>
-            <a:ext cx="5135728" cy="484632"/>
-          </a:xfrm>
-          <a:prstGeom prst="rect">
-            <a:avLst/>
-          </a:prstGeom>
-          <a:noFill/>
-          <a:ln/>
-        </p:spPr>
-        <p:txBody>
-          <a:bodyPr wrap="square" lIns="254" tIns="254" rIns="254" bIns="254" rtlCol="0" anchor="t"/>
-          <a:lstStyle/>
-          <a:p>
-            <a:pPr indent="0" marL="0">
-              <a:buNone/>
-            </a:pPr>
-            <a:r>
-              <a:rPr lang="en-US" sz="2400" b="1" dirty="0">
-                <a:solidFill>
-                  <a:srgbClr val="14213D"/>
-                </a:solidFill>
-                <a:latin typeface="Meiryo" pitchFamily="34" charset="0"/>
-                <a:ea typeface="Meiryo" pitchFamily="34" charset="-122"/>
-                <a:cs typeface="Meiryo" pitchFamily="34" charset="-120"/>
-              </a:rPr>
-              <a:t>約45〜55万円</a:t>
-            </a:r>
-            <a:endParaRPr lang="en-US" sz="2400" dirty="0"/>
-          </a:p>
-        </p:txBody>
-      </p:sp>
-      <p:sp>
-        <p:nvSpPr>
-          <p:cNvPr id="11" name="Text 9"/>
-          <p:cNvSpPr txBox="1"/>
-          <p:nvPr/>
-        </p:nvSpPr>
-        <p:spPr>
-          <a:xfrm>
-            <a:off x="694944" y="2871216"/>
             <a:ext cx="5135728" cy="1889760"/>
           </a:xfrm>
           <a:prstGeom prst="rect">
@@ -5783,7 +5744,7 @@
                 <a:ea typeface="Meiryo" pitchFamily="34" charset="-122"/>
                 <a:cs typeface="Meiryo" pitchFamily="34" charset="-120"/>
               </a:rPr>
-              <a:t>NVIDIA GeForce RTX 5070 Ti 16GB（RTX 5060 Ti 16GBなら約10万円減）</a:t>
+              <a:t>NVIDIA GeForce RTX 5070 Ti 16GB（または RTX 5060 Ti 16GB）</a:t>
             </a:r>
             <a:endParaRPr lang="en-US" sz="1150" dirty="0"/>
           </a:p>
@@ -6001,18 +5962,18 @@
       </p:sp>
       <p:sp>
         <p:nvSpPr>
-          <p:cNvPr id="12" name="Shape 10"/>
+          <p:cNvPr id="11" name="Shape 9"/>
           <p:cNvSpPr/>
           <p:nvPr/>
         </p:nvSpPr>
         <p:spPr>
           <a:xfrm>
             <a:off x="6196432" y="1572768"/>
-            <a:ext cx="5464912" cy="3721418"/>
+            <a:ext cx="5464912" cy="3200210"/>
           </a:xfrm>
           <a:prstGeom prst="roundRect">
             <a:avLst>
-              <a:gd name="adj" fmla="val 2457"/>
+              <a:gd name="adj" fmla="val 2857"/>
             </a:avLst>
           </a:prstGeom>
           <a:solidFill>
@@ -6035,7 +5996,7 @@
       </p:sp>
       <p:sp>
         <p:nvSpPr>
-          <p:cNvPr id="13" name="Text 11"/>
+          <p:cNvPr id="12" name="Text 10"/>
           <p:cNvSpPr txBox="1"/>
           <p:nvPr/>
         </p:nvSpPr>
@@ -6074,7 +6035,7 @@
       </p:sp>
       <p:sp>
         <p:nvSpPr>
-          <p:cNvPr id="14" name="Text 12"/>
+          <p:cNvPr id="13" name="Text 11"/>
           <p:cNvSpPr txBox="1"/>
           <p:nvPr/>
         </p:nvSpPr>
@@ -6113,52 +6074,13 @@
       </p:sp>
       <p:sp>
         <p:nvSpPr>
-          <p:cNvPr id="15" name="Text 13"/>
+          <p:cNvPr id="14" name="Text 12"/>
           <p:cNvSpPr txBox="1"/>
           <p:nvPr/>
         </p:nvSpPr>
         <p:spPr>
           <a:xfrm>
             <a:off x="6361024" y="2521458"/>
-            <a:ext cx="5135728" cy="484632"/>
-          </a:xfrm>
-          <a:prstGeom prst="rect">
-            <a:avLst/>
-          </a:prstGeom>
-          <a:noFill/>
-          <a:ln/>
-        </p:spPr>
-        <p:txBody>
-          <a:bodyPr wrap="square" lIns="254" tIns="254" rIns="254" bIns="254" rtlCol="0" anchor="t"/>
-          <a:lstStyle/>
-          <a:p>
-            <a:pPr indent="0" marL="0">
-              <a:buNone/>
-            </a:pPr>
-            <a:r>
-              <a:rPr lang="en-US" sz="2400" b="1" dirty="0">
-                <a:solidFill>
-                  <a:srgbClr val="FFFFFF"/>
-                </a:solidFill>
-                <a:latin typeface="Meiryo" pitchFamily="34" charset="0"/>
-                <a:ea typeface="Meiryo" pitchFamily="34" charset="-122"/>
-                <a:cs typeface="Meiryo" pitchFamily="34" charset="-120"/>
-              </a:rPr>
-              <a:t>約60〜70万円</a:t>
-            </a:r>
-            <a:endParaRPr lang="en-US" sz="2400" dirty="0"/>
-          </a:p>
-        </p:txBody>
-      </p:sp>
-      <p:sp>
-        <p:nvSpPr>
-          <p:cNvPr id="16" name="Text 14"/>
-          <p:cNvSpPr txBox="1"/>
-          <p:nvPr/>
-        </p:nvSpPr>
-        <p:spPr>
-          <a:xfrm>
-            <a:off x="6361024" y="3042666"/>
             <a:ext cx="5135728" cy="2086928"/>
           </a:xfrm>
           <a:prstGeom prst="rect">
@@ -6562,7 +6484,7 @@
                 <a:ea typeface="Meiryo" pitchFamily="34" charset="-122"/>
                 <a:cs typeface="Meiryo" pitchFamily="34" charset="-120"/>
               </a:rPr>
-              <a:t>ノートPCをLAN内のAIサーバーとして使う構成。GPU 2枚構成が組めないためVRAM上限は24GBで、同じ予算ではデスクトップより一段階下の性能になります</a:t>
+              <a:t>ノートPCをLAN内のAIサーバーとして使う構成。GPU 2枚構成が組めないためVRAM上限は24GBで、デスクトップより一段階下の性能になります</a:t>
             </a:r>
             <a:endParaRPr lang="en-US" sz="1100" dirty="0"/>
           </a:p>
@@ -6631,9 +6553,8 @@
               <a:tblPr/>
               <a:tblGrid>
                 <a:gridCol w="2448818"/>
-                <a:gridCol w="3339297"/>
-                <a:gridCol w="1447029"/>
-                <a:gridCol w="3895847"/>
+                <a:gridCol w="3561917"/>
+                <a:gridCol w="5120256"/>
               </a:tblGrid>
               <a:tr h="329184">
                 <a:tc>
@@ -6789,74 +6710,6 @@
                           <a:ea typeface="Meiryo" pitchFamily="34" charset="-122"/>
                           <a:cs typeface="Meiryo" pitchFamily="34" charset="-120"/>
                         </a:rPr>
-                        <a:t>概算（税抜）</a:t>
-                      </a:r>
-                      <a:endParaRPr lang="en-US" sz="1050" dirty="0">
-                        <a:latin typeface="Meiryo" charset="0"/>
-                        <a:ea typeface="Meiryo" charset="0"/>
-                        <a:cs typeface="Meiryo" charset="0"/>
-                      </a:endParaRPr>
-                    </a:p>
-                  </a:txBody>
-                  <a:tcPr marL="54864" marR="54864" marT="54864" marB="54864" anchor="ctr">
-                    <a:lnL w="6350" cap="flat" cmpd="sng" algn="ctr">
-                      <a:solidFill>
-                        <a:srgbClr val="D9DCE3"/>
-                      </a:solidFill>
-                      <a:prstDash val="solid"/>
-                      <a:round/>
-                      <a:headEnd type="none" w="med" len="med"/>
-                      <a:tailEnd type="none" w="med" len="med"/>
-                    </a:lnL>
-                    <a:lnR w="6350" cap="flat" cmpd="sng" algn="ctr">
-                      <a:solidFill>
-                        <a:srgbClr val="D9DCE3"/>
-                      </a:solidFill>
-                      <a:prstDash val="solid"/>
-                      <a:round/>
-                      <a:headEnd type="none" w="med" len="med"/>
-                      <a:tailEnd type="none" w="med" len="med"/>
-                    </a:lnR>
-                    <a:lnT w="6350" cap="flat" cmpd="sng" algn="ctr">
-                      <a:solidFill>
-                        <a:srgbClr val="D9DCE3"/>
-                      </a:solidFill>
-                      <a:prstDash val="solid"/>
-                      <a:round/>
-                      <a:headEnd type="none" w="med" len="med"/>
-                      <a:tailEnd type="none" w="med" len="med"/>
-                    </a:lnT>
-                    <a:lnB w="6350" cap="flat" cmpd="sng" algn="ctr">
-                      <a:solidFill>
-                        <a:srgbClr val="D9DCE3"/>
-                      </a:solidFill>
-                      <a:prstDash val="solid"/>
-                      <a:round/>
-                      <a:headEnd type="none" w="med" len="med"/>
-                      <a:tailEnd type="none" w="med" len="med"/>
-                    </a:lnB>
-                    <a:solidFill>
-                      <a:srgbClr val="14213D"/>
-                    </a:solidFill>
-                  </a:tcPr>
-                </a:tc>
-                <a:tc>
-                  <a:txBody>
-                    <a:bodyPr/>
-                    <a:lstStyle/>
-                    <a:p>
-                      <a:pPr indent="0" marL="0">
-                        <a:buNone/>
-                      </a:pPr>
-                      <a:r>
-                        <a:rPr lang="en-US" sz="1050" b="1" dirty="0">
-                          <a:solidFill>
-                            <a:srgbClr val="FFFFFF"/>
-                          </a:solidFill>
-                          <a:latin typeface="Meiryo" pitchFamily="34" charset="0"/>
-                          <a:ea typeface="Meiryo" pitchFamily="34" charset="-122"/>
-                          <a:cs typeface="Meiryo" pitchFamily="34" charset="-120"/>
-                        </a:rPr>
                         <a:t>動作モデル・評価</a:t>
                       </a:r>
                       <a:endParaRPr lang="en-US" sz="1050" dirty="0">
@@ -6909,7 +6762,7 @@
                   </a:tcPr>
                 </a:tc>
               </a:tr>
-              <a:tr h="493014">
+              <a:tr h="569595">
                 <a:tc>
                   <a:txBody>
                     <a:bodyPr/>
@@ -7063,7 +6916,7 @@
                           <a:ea typeface="Meiryo" pitchFamily="34" charset="-122"/>
                           <a:cs typeface="Meiryo" pitchFamily="34" charset="-120"/>
                         </a:rPr>
-                        <a:t>60〜80万円</a:t>
+                        <a:t>Gemma 4 31B DenseがVRAM内で動作（約15〜20トークン/秒）。ノートPC構成の中では最上位</a:t>
                       </a:r>
                       <a:endParaRPr lang="en-US" sz="1050" dirty="0">
                         <a:latin typeface="Meiryo" charset="0"/>
@@ -7114,76 +6967,8 @@
                     </a:solidFill>
                   </a:tcPr>
                 </a:tc>
-                <a:tc>
-                  <a:txBody>
-                    <a:bodyPr/>
-                    <a:lstStyle/>
-                    <a:p>
-                      <a:pPr indent="0" marL="0">
-                        <a:buNone/>
-                      </a:pPr>
-                      <a:r>
-                        <a:rPr lang="en-US" sz="1050" dirty="0">
-                          <a:solidFill>
-                            <a:srgbClr val="1A1A1A"/>
-                          </a:solidFill>
-                          <a:latin typeface="Meiryo" pitchFamily="34" charset="0"/>
-                          <a:ea typeface="Meiryo" pitchFamily="34" charset="-122"/>
-                          <a:cs typeface="Meiryo" pitchFamily="34" charset="-120"/>
-                        </a:rPr>
-                        <a:t>Gemma 4 31B DenseがVRAM内で動作（約15〜20トークン/秒）。予算内に収まる機種が限られるため要見積</a:t>
-                      </a:r>
-                      <a:endParaRPr lang="en-US" sz="1050" dirty="0">
-                        <a:latin typeface="Meiryo" charset="0"/>
-                        <a:ea typeface="Meiryo" charset="0"/>
-                        <a:cs typeface="Meiryo" charset="0"/>
-                      </a:endParaRPr>
-                    </a:p>
-                  </a:txBody>
-                  <a:tcPr marL="54864" marR="54864" marT="54864" marB="54864" anchor="t">
-                    <a:lnL w="6350" cap="flat" cmpd="sng" algn="ctr">
-                      <a:solidFill>
-                        <a:srgbClr val="D9DCE3"/>
-                      </a:solidFill>
-                      <a:prstDash val="solid"/>
-                      <a:round/>
-                      <a:headEnd type="none" w="med" len="med"/>
-                      <a:tailEnd type="none" w="med" len="med"/>
-                    </a:lnL>
-                    <a:lnR w="6350" cap="flat" cmpd="sng" algn="ctr">
-                      <a:solidFill>
-                        <a:srgbClr val="D9DCE3"/>
-                      </a:solidFill>
-                      <a:prstDash val="solid"/>
-                      <a:round/>
-                      <a:headEnd type="none" w="med" len="med"/>
-                      <a:tailEnd type="none" w="med" len="med"/>
-                    </a:lnR>
-                    <a:lnT w="6350" cap="flat" cmpd="sng" algn="ctr">
-                      <a:solidFill>
-                        <a:srgbClr val="D9DCE3"/>
-                      </a:solidFill>
-                      <a:prstDash val="solid"/>
-                      <a:round/>
-                      <a:headEnd type="none" w="med" len="med"/>
-                      <a:tailEnd type="none" w="med" len="med"/>
-                    </a:lnT>
-                    <a:lnB w="6350" cap="flat" cmpd="sng" algn="ctr">
-                      <a:solidFill>
-                        <a:srgbClr val="D9DCE3"/>
-                      </a:solidFill>
-                      <a:prstDash val="solid"/>
-                      <a:round/>
-                      <a:headEnd type="none" w="med" len="med"/>
-                      <a:tailEnd type="none" w="med" len="med"/>
-                    </a:lnB>
-                    <a:solidFill>
-                      <a:srgbClr val="FFFFFF"/>
-                    </a:solidFill>
-                  </a:tcPr>
-                </a:tc>
               </a:tr>
-              <a:tr h="666369">
+              <a:tr h="569595">
                 <a:tc>
                   <a:txBody>
                     <a:bodyPr/>
@@ -7361,7 +7146,7 @@
                           <a:ea typeface="Meiryo" pitchFamily="34" charset="-122"/>
                           <a:cs typeface="Meiryo" pitchFamily="34" charset="-120"/>
                         </a:rPr>
-                        <a:t>40〜50万円</a:t>
+                        <a:t>デスクトップ案Aと同等（Gemma 4 12B / 26B MoE、Devstral 24B）。31B Denseは対象外。性能・調達のバランスが最良</a:t>
                       </a:r>
                       <a:endParaRPr lang="en-US" sz="1050" dirty="0">
                         <a:latin typeface="Meiryo" charset="0"/>
@@ -7412,76 +7197,8 @@
                     </a:solidFill>
                   </a:tcPr>
                 </a:tc>
-                <a:tc>
-                  <a:txBody>
-                    <a:bodyPr/>
-                    <a:lstStyle/>
-                    <a:p>
-                      <a:pPr indent="0" marL="0">
-                        <a:buNone/>
-                      </a:pPr>
-                      <a:r>
-                        <a:rPr lang="en-US" sz="1050" dirty="0">
-                          <a:solidFill>
-                            <a:srgbClr val="1A1A1A"/>
-                          </a:solidFill>
-                          <a:latin typeface="Meiryo" pitchFamily="34" charset="0"/>
-                          <a:ea typeface="Meiryo" pitchFamily="34" charset="-122"/>
-                          <a:cs typeface="Meiryo" pitchFamily="34" charset="-120"/>
-                        </a:rPr>
-                        <a:t>デスクトップ案Aと同等（Gemma 4 12B / 26B MoE、Devstral 24B）。31B Denseは対象外。価格・性能・調達のバランスが最良</a:t>
-                      </a:r>
-                      <a:endParaRPr lang="en-US" sz="1050" dirty="0">
-                        <a:latin typeface="Meiryo" charset="0"/>
-                        <a:ea typeface="Meiryo" charset="0"/>
-                        <a:cs typeface="Meiryo" charset="0"/>
-                      </a:endParaRPr>
-                    </a:p>
-                  </a:txBody>
-                  <a:tcPr marL="54864" marR="54864" marT="54864" marB="54864" anchor="t">
-                    <a:lnL w="6350" cap="flat" cmpd="sng" algn="ctr">
-                      <a:solidFill>
-                        <a:srgbClr val="D9DCE3"/>
-                      </a:solidFill>
-                      <a:prstDash val="solid"/>
-                      <a:round/>
-                      <a:headEnd type="none" w="med" len="med"/>
-                      <a:tailEnd type="none" w="med" len="med"/>
-                    </a:lnL>
-                    <a:lnR w="6350" cap="flat" cmpd="sng" algn="ctr">
-                      <a:solidFill>
-                        <a:srgbClr val="D9DCE3"/>
-                      </a:solidFill>
-                      <a:prstDash val="solid"/>
-                      <a:round/>
-                      <a:headEnd type="none" w="med" len="med"/>
-                      <a:tailEnd type="none" w="med" len="med"/>
-                    </a:lnR>
-                    <a:lnT w="6350" cap="flat" cmpd="sng" algn="ctr">
-                      <a:solidFill>
-                        <a:srgbClr val="D9DCE3"/>
-                      </a:solidFill>
-                      <a:prstDash val="solid"/>
-                      <a:round/>
-                      <a:headEnd type="none" w="med" len="med"/>
-                      <a:tailEnd type="none" w="med" len="med"/>
-                    </a:lnT>
-                    <a:lnB w="6350" cap="flat" cmpd="sng" algn="ctr">
-                      <a:solidFill>
-                        <a:srgbClr val="D9DCE3"/>
-                      </a:solidFill>
-                      <a:prstDash val="solid"/>
-                      <a:round/>
-                      <a:headEnd type="none" w="med" len="med"/>
-                      <a:tailEnd type="none" w="med" len="med"/>
-                    </a:lnB>
-                    <a:solidFill>
-                      <a:srgbClr val="FAFBFC"/>
-                    </a:solidFill>
-                  </a:tcPr>
-                </a:tc>
               </a:tr>
-              <a:tr h="666369">
+              <a:tr h="569595">
                 <a:tc>
                   <a:txBody>
                     <a:bodyPr/>
@@ -7659,74 +7376,6 @@
                           <a:ea typeface="Meiryo" pitchFamily="34" charset="-122"/>
                           <a:cs typeface="Meiryo" pitchFamily="34" charset="-120"/>
                         </a:rPr>
-                        <a:t>55〜70万円</a:t>
-                      </a:r>
-                      <a:endParaRPr lang="en-US" sz="1050" dirty="0">
-                        <a:latin typeface="Meiryo" charset="0"/>
-                        <a:ea typeface="Meiryo" charset="0"/>
-                        <a:cs typeface="Meiryo" charset="0"/>
-                      </a:endParaRPr>
-                    </a:p>
-                  </a:txBody>
-                  <a:tcPr marL="54864" marR="54864" marT="54864" marB="54864" anchor="t">
-                    <a:lnL w="6350" cap="flat" cmpd="sng" algn="ctr">
-                      <a:solidFill>
-                        <a:srgbClr val="D9DCE3"/>
-                      </a:solidFill>
-                      <a:prstDash val="solid"/>
-                      <a:round/>
-                      <a:headEnd type="none" w="med" len="med"/>
-                      <a:tailEnd type="none" w="med" len="med"/>
-                    </a:lnL>
-                    <a:lnR w="6350" cap="flat" cmpd="sng" algn="ctr">
-                      <a:solidFill>
-                        <a:srgbClr val="D9DCE3"/>
-                      </a:solidFill>
-                      <a:prstDash val="solid"/>
-                      <a:round/>
-                      <a:headEnd type="none" w="med" len="med"/>
-                      <a:tailEnd type="none" w="med" len="med"/>
-                    </a:lnR>
-                    <a:lnT w="6350" cap="flat" cmpd="sng" algn="ctr">
-                      <a:solidFill>
-                        <a:srgbClr val="D9DCE3"/>
-                      </a:solidFill>
-                      <a:prstDash val="solid"/>
-                      <a:round/>
-                      <a:headEnd type="none" w="med" len="med"/>
-                      <a:tailEnd type="none" w="med" len="med"/>
-                    </a:lnT>
-                    <a:lnB w="6350" cap="flat" cmpd="sng" algn="ctr">
-                      <a:solidFill>
-                        <a:srgbClr val="D9DCE3"/>
-                      </a:solidFill>
-                      <a:prstDash val="solid"/>
-                      <a:round/>
-                      <a:headEnd type="none" w="med" len="med"/>
-                      <a:tailEnd type="none" w="med" len="med"/>
-                    </a:lnB>
-                    <a:solidFill>
-                      <a:srgbClr val="FFFFFF"/>
-                    </a:solidFill>
-                  </a:tcPr>
-                </a:tc>
-                <a:tc>
-                  <a:txBody>
-                    <a:bodyPr/>
-                    <a:lstStyle/>
-                    <a:p>
-                      <a:pPr indent="0" marL="0">
-                        <a:buNone/>
-                      </a:pPr>
-                      <a:r>
-                        <a:rPr lang="en-US" sz="1050" dirty="0">
-                          <a:solidFill>
-                            <a:srgbClr val="1A1A1A"/>
-                          </a:solidFill>
-                          <a:latin typeface="Meiryo" pitchFamily="34" charset="0"/>
-                          <a:ea typeface="Meiryo" pitchFamily="34" charset="-122"/>
-                          <a:cs typeface="Meiryo" pitchFamily="34" charset="-120"/>
-                        </a:rPr>
                         <a:t>31B Denseはメモリに収まるが帯域256GB/sのため約5〜8トークン/秒。Gemma 4 26B MoEなら約20〜30トークン/秒で実用的。Ollamaでの事前動作検証が前提</a:t>
                       </a:r>
                       <a:endParaRPr lang="en-US" sz="1050" dirty="0">
@@ -7779,7 +7428,7 @@
                   </a:tcPr>
                 </a:tc>
               </a:tr>
-              <a:tr h="493014">
+              <a:tr h="569595">
                 <a:tc>
                   <a:txBody>
                     <a:bodyPr/>
@@ -7925,74 +7574,6 @@
                         <a:buNone/>
                       </a:pPr>
                       <a:r>
-                        <a:rPr lang="en-US" sz="1050" b="1" dirty="0">
-                          <a:solidFill>
-                            <a:srgbClr val="B3261E"/>
-                          </a:solidFill>
-                          <a:latin typeface="Meiryo" pitchFamily="34" charset="0"/>
-                          <a:ea typeface="Meiryo" pitchFamily="34" charset="-122"/>
-                          <a:cs typeface="Meiryo" pitchFamily="34" charset="-120"/>
-                        </a:rPr>
-                        <a:t>70〜80万円</a:t>
-                      </a:r>
-                      <a:endParaRPr lang="en-US" sz="1050" dirty="0">
-                        <a:latin typeface="Meiryo" charset="0"/>
-                        <a:ea typeface="Meiryo" charset="0"/>
-                        <a:cs typeface="Meiryo" charset="0"/>
-                      </a:endParaRPr>
-                    </a:p>
-                  </a:txBody>
-                  <a:tcPr marL="54864" marR="54864" marT="54864" marB="54864" anchor="t">
-                    <a:lnL w="6350" cap="flat" cmpd="sng" algn="ctr">
-                      <a:solidFill>
-                        <a:srgbClr val="D9DCE3"/>
-                      </a:solidFill>
-                      <a:prstDash val="solid"/>
-                      <a:round/>
-                      <a:headEnd type="none" w="med" len="med"/>
-                      <a:tailEnd type="none" w="med" len="med"/>
-                    </a:lnL>
-                    <a:lnR w="6350" cap="flat" cmpd="sng" algn="ctr">
-                      <a:solidFill>
-                        <a:srgbClr val="D9DCE3"/>
-                      </a:solidFill>
-                      <a:prstDash val="solid"/>
-                      <a:round/>
-                      <a:headEnd type="none" w="med" len="med"/>
-                      <a:tailEnd type="none" w="med" len="med"/>
-                    </a:lnR>
-                    <a:lnT w="6350" cap="flat" cmpd="sng" algn="ctr">
-                      <a:solidFill>
-                        <a:srgbClr val="D9DCE3"/>
-                      </a:solidFill>
-                      <a:prstDash val="solid"/>
-                      <a:round/>
-                      <a:headEnd type="none" w="med" len="med"/>
-                      <a:tailEnd type="none" w="med" len="med"/>
-                    </a:lnT>
-                    <a:lnB w="6350" cap="flat" cmpd="sng" algn="ctr">
-                      <a:solidFill>
-                        <a:srgbClr val="D9DCE3"/>
-                      </a:solidFill>
-                      <a:prstDash val="solid"/>
-                      <a:round/>
-                      <a:headEnd type="none" w="med" len="med"/>
-                      <a:tailEnd type="none" w="med" len="med"/>
-                    </a:lnB>
-                    <a:solidFill>
-                      <a:srgbClr val="FAFBFC"/>
-                    </a:solidFill>
-                  </a:tcPr>
-                </a:tc>
-                <a:tc>
-                  <a:txBody>
-                    <a:bodyPr/>
-                    <a:lstStyle/>
-                    <a:p>
-                      <a:pPr indent="0" marL="0">
-                        <a:buNone/>
-                      </a:pPr>
-                      <a:r>
                         <a:rPr lang="en-US" sz="1050" dirty="0">
                           <a:solidFill>
                             <a:srgbClr val="1A1A1A"/>
@@ -8001,7 +7582,7 @@
                           <a:ea typeface="Meiryo" pitchFamily="34" charset="-122"/>
                           <a:cs typeface="Meiryo" pitchFamily="34" charset="-120"/>
                         </a:rPr>
-                        <a:t>31B Denseで約15トークン/秒。予算超過かつWindows前提の運用・BIOS無効化要件と合わないため参考扱い</a:t>
+                        <a:t>31B Denseで約15トークン/秒。Windows前提の運用・BIOS無効化要件と合わないため参考扱い</a:t>
                       </a:r>
                       <a:endParaRPr lang="en-US" sz="1050" dirty="0">
                         <a:latin typeface="Meiryo" charset="0"/>
@@ -8065,7 +7646,7 @@
         </p:nvSpPr>
         <p:spPr>
           <a:xfrm>
-            <a:off x="530352" y="4403598"/>
+            <a:off x="530352" y="4363212"/>
             <a:ext cx="5464912" cy="1806512"/>
           </a:xfrm>
           <a:prstGeom prst="roundRect">
@@ -8099,7 +7680,7 @@
         </p:nvSpPr>
         <p:spPr>
           <a:xfrm>
-            <a:off x="694944" y="4568190"/>
+            <a:off x="694944" y="4527804"/>
             <a:ext cx="5135728" cy="313182"/>
           </a:xfrm>
           <a:prstGeom prst="rect">
@@ -8138,7 +7719,7 @@
         </p:nvSpPr>
         <p:spPr>
           <a:xfrm>
-            <a:off x="694944" y="4899660"/>
+            <a:off x="694944" y="4859274"/>
             <a:ext cx="5135728" cy="751523"/>
           </a:xfrm>
           <a:prstGeom prst="rect">
@@ -8188,7 +7769,7 @@
                 <a:ea typeface="Meiryo" pitchFamily="34" charset="-122"/>
                 <a:cs typeface="Meiryo" pitchFamily="34" charset="-120"/>
               </a:rPr>
-              <a:t>同じVRAM容量で価格は約1.5〜2倍。GPUの増設・交換は不可</a:t>
+              <a:t>GPUの増設・交換は不可。性能向上は買い替えのみ</a:t>
             </a:r>
             <a:endParaRPr lang="en-US" sz="1150" dirty="0"/>
           </a:p>
@@ -8223,7 +7804,7 @@
         </p:nvSpPr>
         <p:spPr>
           <a:xfrm>
-            <a:off x="6196432" y="4403598"/>
+            <a:off x="6196432" y="4363212"/>
             <a:ext cx="5464912" cy="1806512"/>
           </a:xfrm>
           <a:prstGeom prst="roundRect">
@@ -8257,7 +7838,7 @@
         </p:nvSpPr>
         <p:spPr>
           <a:xfrm>
-            <a:off x="6361024" y="4568190"/>
+            <a:off x="6361024" y="4527804"/>
             <a:ext cx="5135728" cy="313182"/>
           </a:xfrm>
           <a:prstGeom prst="rect">
@@ -8296,7 +7877,7 @@
         </p:nvSpPr>
         <p:spPr>
           <a:xfrm>
-            <a:off x="6361024" y="4899660"/>
+            <a:off x="6361024" y="4859274"/>
             <a:ext cx="5135728" cy="1145858"/>
           </a:xfrm>
           <a:prstGeom prst="rect">
@@ -9516,7 +9097,7 @@
                 <a:ea typeface="Meiryo" pitchFamily="34" charset="-122"/>
                 <a:cs typeface="Meiryo" pitchFamily="34" charset="-120"/>
               </a:rPr>
-              <a:t>06. 概算費用および導入スケジュール</a:t>
+              <a:t>06. 作業内容および導入スケジュール</a:t>
             </a:r>
             <a:endParaRPr lang="en-US" sz="1050" dirty="0"/>
           </a:p>
@@ -9596,7 +9177,7 @@
                 <a:ea typeface="Meiryo" pitchFamily="34" charset="-122"/>
                 <a:cs typeface="Meiryo" pitchFamily="34" charset="-120"/>
               </a:rPr>
-              <a:t>初期費用のみ。年間保守（モデル更新・障害対応）はオプションとして別途ご提示します</a:t>
+              <a:t>作業はトータル1人月の工数で1名をアサインし、6週間の期間に配分して実施します</a:t>
             </a:r>
             <a:endParaRPr lang="en-US" sz="1100" dirty="0"/>
           </a:p>
@@ -9674,7 +9255,7 @@
                 <a:ea typeface="Meiryo" pitchFamily="34" charset="-122"/>
                 <a:cs typeface="Meiryo" pitchFamily="34" charset="-120"/>
               </a:rPr>
-              <a:t>※ 標準スケジュールは全6週間。GPU搭載PCの納期（2〜4週間）や在庫状況により前後します。</a:t>
+              <a:t>※ 標準スケジュールは全6週間。ハードウェア納期待ちの期間を含むため、実働1人月を6週間に配分します。GPU搭載PCの納期（2〜4週間）や在庫状況により前後します。</a:t>
             </a:r>
             <a:endParaRPr lang="en-US" sz="900" dirty="0"/>
           </a:p>
@@ -9703,9 +9284,8 @@
             <a:tbl>
               <a:tblPr/>
               <a:tblGrid>
-                <a:gridCol w="2448818"/>
-                <a:gridCol w="6233355"/>
-                <a:gridCol w="2448818"/>
+                <a:gridCol w="2671438"/>
+                <a:gridCol w="8459553"/>
               </a:tblGrid>
               <a:tr h="329184">
                 <a:tc>
@@ -9725,7 +9305,7 @@
                           <a:ea typeface="Meiryo" pitchFamily="34" charset="-122"/>
                           <a:cs typeface="Meiryo" pitchFamily="34" charset="-120"/>
                         </a:rPr>
-                        <a:t>費用項目</a:t>
+                        <a:t>作業項目</a:t>
                       </a:r>
                       <a:endParaRPr lang="en-US" sz="1050" dirty="0">
                         <a:latin typeface="Meiryo" charset="0"/>
@@ -9844,76 +9424,8 @@
                     </a:solidFill>
                   </a:tcPr>
                 </a:tc>
-                <a:tc>
-                  <a:txBody>
-                    <a:bodyPr/>
-                    <a:lstStyle/>
-                    <a:p>
-                      <a:pPr indent="0" marL="0">
-                        <a:buNone/>
-                      </a:pPr>
-                      <a:r>
-                        <a:rPr lang="en-US" sz="1050" b="1" dirty="0">
-                          <a:solidFill>
-                            <a:srgbClr val="FFFFFF"/>
-                          </a:solidFill>
-                          <a:latin typeface="Meiryo" pitchFamily="34" charset="0"/>
-                          <a:ea typeface="Meiryo" pitchFamily="34" charset="-122"/>
-                          <a:cs typeface="Meiryo" pitchFamily="34" charset="-120"/>
-                        </a:rPr>
-                        <a:t>概算金額（税抜）</a:t>
-                      </a:r>
-                      <a:endParaRPr lang="en-US" sz="1050" dirty="0">
-                        <a:latin typeface="Meiryo" charset="0"/>
-                        <a:ea typeface="Meiryo" charset="0"/>
-                        <a:cs typeface="Meiryo" charset="0"/>
-                      </a:endParaRPr>
-                    </a:p>
-                  </a:txBody>
-                  <a:tcPr marL="54864" marR="54864" marT="54864" marB="54864" anchor="ctr">
-                    <a:lnL w="6350" cap="flat" cmpd="sng" algn="ctr">
-                      <a:solidFill>
-                        <a:srgbClr val="D9DCE3"/>
-                      </a:solidFill>
-                      <a:prstDash val="solid"/>
-                      <a:round/>
-                      <a:headEnd type="none" w="med" len="med"/>
-                      <a:tailEnd type="none" w="med" len="med"/>
-                    </a:lnL>
-                    <a:lnR w="6350" cap="flat" cmpd="sng" algn="ctr">
-                      <a:solidFill>
-                        <a:srgbClr val="D9DCE3"/>
-                      </a:solidFill>
-                      <a:prstDash val="solid"/>
-                      <a:round/>
-                      <a:headEnd type="none" w="med" len="med"/>
-                      <a:tailEnd type="none" w="med" len="med"/>
-                    </a:lnR>
-                    <a:lnT w="6350" cap="flat" cmpd="sng" algn="ctr">
-                      <a:solidFill>
-                        <a:srgbClr val="D9DCE3"/>
-                      </a:solidFill>
-                      <a:prstDash val="solid"/>
-                      <a:round/>
-                      <a:headEnd type="none" w="med" len="med"/>
-                      <a:tailEnd type="none" w="med" len="med"/>
-                    </a:lnT>
-                    <a:lnB w="6350" cap="flat" cmpd="sng" algn="ctr">
-                      <a:solidFill>
-                        <a:srgbClr val="D9DCE3"/>
-                      </a:solidFill>
-                      <a:prstDash val="solid"/>
-                      <a:round/>
-                      <a:headEnd type="none" w="med" len="med"/>
-                      <a:tailEnd type="none" w="med" len="med"/>
-                    </a:lnB>
-                    <a:solidFill>
-                      <a:srgbClr val="14213D"/>
-                    </a:solidFill>
-                  </a:tcPr>
-                </a:tc>
               </a:tr>
-              <a:tr h="666369">
+              <a:tr h="569595">
                 <a:tc>
                   <a:txBody>
                     <a:bodyPr/>
@@ -9931,7 +9443,7 @@
                           <a:ea typeface="Meiryo" pitchFamily="34" charset="-122"/>
                           <a:cs typeface="Meiryo" pitchFamily="34" charset="-120"/>
                         </a:rPr>
-                        <a:t>1. ハードウェア調達費</a:t>
+                        <a:t>1. ハードウェア調達</a:t>
                       </a:r>
                       <a:endParaRPr lang="en-US" sz="1050" dirty="0">
                         <a:latin typeface="Meiryo" charset="0"/>
@@ -9999,7 +9511,7 @@
                           <a:ea typeface="Meiryo" pitchFamily="34" charset="-122"/>
                           <a:cs typeface="Meiryo" pitchFamily="34" charset="-120"/>
                         </a:rPr>
-                        <a:t>GeForce搭載BTO PC、モニター一式</a:t>
+                        <a:t>構成案の確定、GeForce搭載BTO PC・モニター一式の選定と発注</a:t>
                       </a:r>
                       <a:pPr indent="0" marL="0">
                         <a:buNone/>
@@ -10023,7 +9535,7 @@
                           <a:ea typeface="Meiryo" pitchFamily="34" charset="-122"/>
                           <a:cs typeface="Meiryo" pitchFamily="34" charset="-120"/>
                         </a:rPr>
-                        <a:t>（法人保守契約が必要な場合はRTX PRO搭載機で再見積）</a:t>
+                        <a:t>（法人保守契約が必要な場合はRTX PRO搭載機を選定）</a:t>
                       </a:r>
                       <a:endParaRPr lang="en-US" sz="1050" dirty="0">
                         <a:latin typeface="Meiryo" charset="0"/>
@@ -10074,124 +9586,8 @@
                     </a:solidFill>
                   </a:tcPr>
                 </a:tc>
-                <a:tc>
-                  <a:txBody>
-                    <a:bodyPr/>
-                    <a:lstStyle/>
-                    <a:p>
-                      <a:pPr indent="0" marL="0">
-                        <a:buNone/>
-                      </a:pPr>
-                      <a:r>
-                        <a:rPr lang="en-US" sz="1050" dirty="0">
-                          <a:solidFill>
-                            <a:srgbClr val="1A1A1A"/>
-                          </a:solidFill>
-                          <a:latin typeface="Meiryo" pitchFamily="34" charset="0"/>
-                          <a:ea typeface="Meiryo" pitchFamily="34" charset="-122"/>
-                          <a:cs typeface="Meiryo" pitchFamily="34" charset="-120"/>
-                        </a:rPr>
-                        <a:t>標準 45〜55万円</a:t>
-                      </a:r>
-                      <a:pPr indent="0" marL="0">
-                        <a:buNone/>
-                      </a:pPr>
-                      <a:endParaRPr lang="en-US" sz="1050" dirty="0">
-                        <a:latin typeface="Meiryo" charset="0"/>
-                        <a:ea typeface="Meiryo" charset="0"/>
-                        <a:cs typeface="Meiryo" charset="0"/>
-                      </a:endParaRPr>
-                    </a:p>
-                    <a:p>
-                      <a:pPr indent="0" marL="0">
-                        <a:buNone/>
-                      </a:pPr>
-                      <a:r>
-                        <a:rPr lang="en-US" sz="1050" dirty="0">
-                          <a:solidFill>
-                            <a:srgbClr val="1A1A1A"/>
-                          </a:solidFill>
-                          <a:latin typeface="Meiryo" pitchFamily="34" charset="0"/>
-                          <a:ea typeface="Meiryo" pitchFamily="34" charset="-122"/>
-                          <a:cs typeface="Meiryo" pitchFamily="34" charset="-120"/>
-                        </a:rPr>
-                        <a:t>VRAM 32GB 60〜70万円</a:t>
-                      </a:r>
-                      <a:pPr indent="0" marL="0">
-                        <a:buNone/>
-                      </a:pPr>
-                      <a:endParaRPr lang="en-US" sz="1050" dirty="0">
-                        <a:latin typeface="Meiryo" charset="0"/>
-                        <a:ea typeface="Meiryo" charset="0"/>
-                        <a:cs typeface="Meiryo" charset="0"/>
-                      </a:endParaRPr>
-                    </a:p>
-                    <a:p>
-                      <a:pPr indent="0" marL="0">
-                        <a:buNone/>
-                      </a:pPr>
-                      <a:r>
-                        <a:rPr lang="en-US" sz="1050" dirty="0">
-                          <a:solidFill>
-                            <a:srgbClr val="1A1A1A"/>
-                          </a:solidFill>
-                          <a:latin typeface="Meiryo" pitchFamily="34" charset="0"/>
-                          <a:ea typeface="Meiryo" pitchFamily="34" charset="-122"/>
-                          <a:cs typeface="Meiryo" pitchFamily="34" charset="-120"/>
-                        </a:rPr>
-                        <a:t>ノートPC 40〜50万円</a:t>
-                      </a:r>
-                      <a:endParaRPr lang="en-US" sz="1050" dirty="0">
-                        <a:latin typeface="Meiryo" charset="0"/>
-                        <a:ea typeface="Meiryo" charset="0"/>
-                        <a:cs typeface="Meiryo" charset="0"/>
-                      </a:endParaRPr>
-                    </a:p>
-                  </a:txBody>
-                  <a:tcPr marL="54864" marR="54864" marT="54864" marB="54864" anchor="t">
-                    <a:lnL w="6350" cap="flat" cmpd="sng" algn="ctr">
-                      <a:solidFill>
-                        <a:srgbClr val="D9DCE3"/>
-                      </a:solidFill>
-                      <a:prstDash val="solid"/>
-                      <a:round/>
-                      <a:headEnd type="none" w="med" len="med"/>
-                      <a:tailEnd type="none" w="med" len="med"/>
-                    </a:lnL>
-                    <a:lnR w="6350" cap="flat" cmpd="sng" algn="ctr">
-                      <a:solidFill>
-                        <a:srgbClr val="D9DCE3"/>
-                      </a:solidFill>
-                      <a:prstDash val="solid"/>
-                      <a:round/>
-                      <a:headEnd type="none" w="med" len="med"/>
-                      <a:tailEnd type="none" w="med" len="med"/>
-                    </a:lnR>
-                    <a:lnT w="6350" cap="flat" cmpd="sng" algn="ctr">
-                      <a:solidFill>
-                        <a:srgbClr val="D9DCE3"/>
-                      </a:solidFill>
-                      <a:prstDash val="solid"/>
-                      <a:round/>
-                      <a:headEnd type="none" w="med" len="med"/>
-                      <a:tailEnd type="none" w="med" len="med"/>
-                    </a:lnT>
-                    <a:lnB w="6350" cap="flat" cmpd="sng" algn="ctr">
-                      <a:solidFill>
-                        <a:srgbClr val="D9DCE3"/>
-                      </a:solidFill>
-                      <a:prstDash val="solid"/>
-                      <a:round/>
-                      <a:headEnd type="none" w="med" len="med"/>
-                      <a:tailEnd type="none" w="med" len="med"/>
-                    </a:lnB>
-                    <a:solidFill>
-                      <a:srgbClr val="FFFFFF"/>
-                    </a:solidFill>
-                  </a:tcPr>
-                </a:tc>
               </a:tr>
-              <a:tr h="493014">
+              <a:tr h="569595">
                 <a:tc>
                   <a:txBody>
                     <a:bodyPr/>
@@ -10328,76 +9724,8 @@
                     </a:solidFill>
                   </a:tcPr>
                 </a:tc>
-                <a:tc>
-                  <a:txBody>
-                    <a:bodyPr/>
-                    <a:lstStyle/>
-                    <a:p>
-                      <a:pPr indent="0" marL="0">
-                        <a:buNone/>
-                      </a:pPr>
-                      <a:r>
-                        <a:rPr lang="en-US" sz="1050" dirty="0">
-                          <a:solidFill>
-                            <a:srgbClr val="1A1A1A"/>
-                          </a:solidFill>
-                          <a:latin typeface="Meiryo" pitchFamily="34" charset="0"/>
-                          <a:ea typeface="Meiryo" pitchFamily="34" charset="-122"/>
-                          <a:cs typeface="Meiryo" pitchFamily="34" charset="-120"/>
-                        </a:rPr>
-                        <a:t>35〜50万円</a:t>
-                      </a:r>
-                      <a:endParaRPr lang="en-US" sz="1050" dirty="0">
-                        <a:latin typeface="Meiryo" charset="0"/>
-                        <a:ea typeface="Meiryo" charset="0"/>
-                        <a:cs typeface="Meiryo" charset="0"/>
-                      </a:endParaRPr>
-                    </a:p>
-                  </a:txBody>
-                  <a:tcPr marL="54864" marR="54864" marT="54864" marB="54864" anchor="t">
-                    <a:lnL w="6350" cap="flat" cmpd="sng" algn="ctr">
-                      <a:solidFill>
-                        <a:srgbClr val="D9DCE3"/>
-                      </a:solidFill>
-                      <a:prstDash val="solid"/>
-                      <a:round/>
-                      <a:headEnd type="none" w="med" len="med"/>
-                      <a:tailEnd type="none" w="med" len="med"/>
-                    </a:lnL>
-                    <a:lnR w="6350" cap="flat" cmpd="sng" algn="ctr">
-                      <a:solidFill>
-                        <a:srgbClr val="D9DCE3"/>
-                      </a:solidFill>
-                      <a:prstDash val="solid"/>
-                      <a:round/>
-                      <a:headEnd type="none" w="med" len="med"/>
-                      <a:tailEnd type="none" w="med" len="med"/>
-                    </a:lnR>
-                    <a:lnT w="6350" cap="flat" cmpd="sng" algn="ctr">
-                      <a:solidFill>
-                        <a:srgbClr val="D9DCE3"/>
-                      </a:solidFill>
-                      <a:prstDash val="solid"/>
-                      <a:round/>
-                      <a:headEnd type="none" w="med" len="med"/>
-                      <a:tailEnd type="none" w="med" len="med"/>
-                    </a:lnT>
-                    <a:lnB w="6350" cap="flat" cmpd="sng" algn="ctr">
-                      <a:solidFill>
-                        <a:srgbClr val="D9DCE3"/>
-                      </a:solidFill>
-                      <a:prstDash val="solid"/>
-                      <a:round/>
-                      <a:headEnd type="none" w="med" len="med"/>
-                      <a:tailEnd type="none" w="med" len="med"/>
-                    </a:lnB>
-                    <a:solidFill>
-                      <a:srgbClr val="FAFBFC"/>
-                    </a:solidFill>
-                  </a:tcPr>
-                </a:tc>
               </a:tr>
-              <a:tr h="319659">
+              <a:tr h="376238">
                 <a:tc>
                   <a:txBody>
                     <a:bodyPr/>
@@ -10534,76 +9862,8 @@
                     </a:solidFill>
                   </a:tcPr>
                 </a:tc>
-                <a:tc>
-                  <a:txBody>
-                    <a:bodyPr/>
-                    <a:lstStyle/>
-                    <a:p>
-                      <a:pPr indent="0" marL="0">
-                        <a:buNone/>
-                      </a:pPr>
-                      <a:r>
-                        <a:rPr lang="en-US" sz="1050" dirty="0">
-                          <a:solidFill>
-                            <a:srgbClr val="1A1A1A"/>
-                          </a:solidFill>
-                          <a:latin typeface="Meiryo" pitchFamily="34" charset="0"/>
-                          <a:ea typeface="Meiryo" pitchFamily="34" charset="-122"/>
-                          <a:cs typeface="Meiryo" pitchFamily="34" charset="-120"/>
-                        </a:rPr>
-                        <a:t>15〜25万円</a:t>
-                      </a:r>
-                      <a:endParaRPr lang="en-US" sz="1050" dirty="0">
-                        <a:latin typeface="Meiryo" charset="0"/>
-                        <a:ea typeface="Meiryo" charset="0"/>
-                        <a:cs typeface="Meiryo" charset="0"/>
-                      </a:endParaRPr>
-                    </a:p>
-                  </a:txBody>
-                  <a:tcPr marL="54864" marR="54864" marT="54864" marB="54864" anchor="t">
-                    <a:lnL w="6350" cap="flat" cmpd="sng" algn="ctr">
-                      <a:solidFill>
-                        <a:srgbClr val="D9DCE3"/>
-                      </a:solidFill>
-                      <a:prstDash val="solid"/>
-                      <a:round/>
-                      <a:headEnd type="none" w="med" len="med"/>
-                      <a:tailEnd type="none" w="med" len="med"/>
-                    </a:lnL>
-                    <a:lnR w="6350" cap="flat" cmpd="sng" algn="ctr">
-                      <a:solidFill>
-                        <a:srgbClr val="D9DCE3"/>
-                      </a:solidFill>
-                      <a:prstDash val="solid"/>
-                      <a:round/>
-                      <a:headEnd type="none" w="med" len="med"/>
-                      <a:tailEnd type="none" w="med" len="med"/>
-                    </a:lnR>
-                    <a:lnT w="6350" cap="flat" cmpd="sng" algn="ctr">
-                      <a:solidFill>
-                        <a:srgbClr val="D9DCE3"/>
-                      </a:solidFill>
-                      <a:prstDash val="solid"/>
-                      <a:round/>
-                      <a:headEnd type="none" w="med" len="med"/>
-                      <a:tailEnd type="none" w="med" len="med"/>
-                    </a:lnT>
-                    <a:lnB w="6350" cap="flat" cmpd="sng" algn="ctr">
-                      <a:solidFill>
-                        <a:srgbClr val="D9DCE3"/>
-                      </a:solidFill>
-                      <a:prstDash val="solid"/>
-                      <a:round/>
-                      <a:headEnd type="none" w="med" len="med"/>
-                      <a:tailEnd type="none" w="med" len="med"/>
-                    </a:lnB>
-                    <a:solidFill>
-                      <a:srgbClr val="FFFFFF"/>
-                    </a:solidFill>
-                  </a:tcPr>
-                </a:tc>
               </a:tr>
-              <a:tr h="493014">
+              <a:tr h="376238">
                 <a:tc>
                   <a:txBody>
                     <a:bodyPr/>
@@ -10740,74 +10000,6 @@
                     </a:solidFill>
                   </a:tcPr>
                 </a:tc>
-                <a:tc>
-                  <a:txBody>
-                    <a:bodyPr/>
-                    <a:lstStyle/>
-                    <a:p>
-                      <a:pPr indent="0" marL="0">
-                        <a:buNone/>
-                      </a:pPr>
-                      <a:r>
-                        <a:rPr lang="en-US" sz="1050" dirty="0">
-                          <a:solidFill>
-                            <a:srgbClr val="1A1A1A"/>
-                          </a:solidFill>
-                          <a:latin typeface="Meiryo" pitchFamily="34" charset="0"/>
-                          <a:ea typeface="Meiryo" pitchFamily="34" charset="-122"/>
-                          <a:cs typeface="Meiryo" pitchFamily="34" charset="-120"/>
-                        </a:rPr>
-                        <a:t>10〜15万円</a:t>
-                      </a:r>
-                      <a:endParaRPr lang="en-US" sz="1050" dirty="0">
-                        <a:latin typeface="Meiryo" charset="0"/>
-                        <a:ea typeface="Meiryo" charset="0"/>
-                        <a:cs typeface="Meiryo" charset="0"/>
-                      </a:endParaRPr>
-                    </a:p>
-                  </a:txBody>
-                  <a:tcPr marL="54864" marR="54864" marT="54864" marB="54864" anchor="t">
-                    <a:lnL w="6350" cap="flat" cmpd="sng" algn="ctr">
-                      <a:solidFill>
-                        <a:srgbClr val="D9DCE3"/>
-                      </a:solidFill>
-                      <a:prstDash val="solid"/>
-                      <a:round/>
-                      <a:headEnd type="none" w="med" len="med"/>
-                      <a:tailEnd type="none" w="med" len="med"/>
-                    </a:lnL>
-                    <a:lnR w="6350" cap="flat" cmpd="sng" algn="ctr">
-                      <a:solidFill>
-                        <a:srgbClr val="D9DCE3"/>
-                      </a:solidFill>
-                      <a:prstDash val="solid"/>
-                      <a:round/>
-                      <a:headEnd type="none" w="med" len="med"/>
-                      <a:tailEnd type="none" w="med" len="med"/>
-                    </a:lnR>
-                    <a:lnT w="6350" cap="flat" cmpd="sng" algn="ctr">
-                      <a:solidFill>
-                        <a:srgbClr val="D9DCE3"/>
-                      </a:solidFill>
-                      <a:prstDash val="solid"/>
-                      <a:round/>
-                      <a:headEnd type="none" w="med" len="med"/>
-                      <a:tailEnd type="none" w="med" len="med"/>
-                    </a:lnT>
-                    <a:lnB w="6350" cap="flat" cmpd="sng" algn="ctr">
-                      <a:solidFill>
-                        <a:srgbClr val="D9DCE3"/>
-                      </a:solidFill>
-                      <a:prstDash val="solid"/>
-                      <a:round/>
-                      <a:headEnd type="none" w="med" len="med"/>
-                      <a:tailEnd type="none" w="med" len="med"/>
-                    </a:lnB>
-                    <a:solidFill>
-                      <a:srgbClr val="FAFBFC"/>
-                    </a:solidFill>
-                  </a:tcPr>
-                </a:tc>
               </a:tr>
             </a:tbl>
           </a:graphicData>
@@ -10821,7 +10013,7 @@
         </p:nvSpPr>
         <p:spPr>
           <a:xfrm>
-            <a:off x="530352" y="4056888"/>
+            <a:off x="530352" y="3976497"/>
             <a:ext cx="11130991" cy="566928"/>
           </a:xfrm>
           <a:prstGeom prst="roundRect">
@@ -10848,7 +10040,7 @@
         </p:nvSpPr>
         <p:spPr>
           <a:xfrm>
-            <a:off x="713232" y="4056888"/>
+            <a:off x="713232" y="3976497"/>
             <a:ext cx="10765231" cy="566928"/>
           </a:xfrm>
           <a:prstGeom prst="rect">
@@ -10873,7 +10065,7 @@
                 <a:ea typeface="Meiryo" pitchFamily="34" charset="-122"/>
                 <a:cs typeface="Meiryo" pitchFamily="34" charset="-120"/>
               </a:rPr>
-              <a:t>初期導入費用 合計概算（税抜）    </a:t>
+              <a:t>作業工数    </a:t>
             </a:r>
             <a:pPr indent="0" marL="0">
               <a:buNone/>
@@ -10887,7 +10079,7 @@
                 <a:ea typeface="Meiryo" pitchFamily="34" charset="-122"/>
                 <a:cs typeface="Meiryo" pitchFamily="34" charset="-120"/>
               </a:rPr>
-              <a:t>標準構成 105〜145万円 ／ VRAM 32GB構成 120〜160万円</a:t>
+              <a:t>トータル1人月（担当者1名をアサイン）</a:t>
             </a:r>
             <a:endParaRPr lang="en-US" sz="1000" dirty="0"/>
           </a:p>
@@ -10901,7 +10093,7 @@
         </p:nvSpPr>
         <p:spPr>
           <a:xfrm>
-            <a:off x="530352" y="4788408"/>
+            <a:off x="530352" y="4708017"/>
             <a:ext cx="2138416" cy="1005840"/>
           </a:xfrm>
           <a:prstGeom prst="roundRect">
@@ -10928,7 +10120,7 @@
         </p:nvSpPr>
         <p:spPr>
           <a:xfrm>
-            <a:off x="621792" y="4861560"/>
+            <a:off x="621792" y="4781169"/>
             <a:ext cx="1955536" cy="859536"/>
           </a:xfrm>
           <a:prstGeom prst="rect">
@@ -10984,7 +10176,7 @@
         </p:nvSpPr>
         <p:spPr>
           <a:xfrm>
-            <a:off x="2778496" y="4788408"/>
+            <a:off x="2778496" y="4708017"/>
             <a:ext cx="2138416" cy="1005840"/>
           </a:xfrm>
           <a:prstGeom prst="roundRect">
@@ -11011,7 +10203,7 @@
         </p:nvSpPr>
         <p:spPr>
           <a:xfrm>
-            <a:off x="2869936" y="4861560"/>
+            <a:off x="2869936" y="4781169"/>
             <a:ext cx="1955536" cy="859536"/>
           </a:xfrm>
           <a:prstGeom prst="rect">
@@ -11067,7 +10259,7 @@
         </p:nvSpPr>
         <p:spPr>
           <a:xfrm>
-            <a:off x="5026640" y="4788408"/>
+            <a:off x="5026640" y="4708017"/>
             <a:ext cx="2138416" cy="1005840"/>
           </a:xfrm>
           <a:prstGeom prst="roundRect">
@@ -11094,7 +10286,7 @@
         </p:nvSpPr>
         <p:spPr>
           <a:xfrm>
-            <a:off x="5118080" y="4861560"/>
+            <a:off x="5118080" y="4781169"/>
             <a:ext cx="1955536" cy="859536"/>
           </a:xfrm>
           <a:prstGeom prst="rect">
@@ -11150,7 +10342,7 @@
         </p:nvSpPr>
         <p:spPr>
           <a:xfrm>
-            <a:off x="7274784" y="4788408"/>
+            <a:off x="7274784" y="4708017"/>
             <a:ext cx="2138416" cy="1005840"/>
           </a:xfrm>
           <a:prstGeom prst="roundRect">
@@ -11177,7 +10369,7 @@
         </p:nvSpPr>
         <p:spPr>
           <a:xfrm>
-            <a:off x="7366224" y="4861560"/>
+            <a:off x="7366224" y="4781169"/>
             <a:ext cx="1955536" cy="859536"/>
           </a:xfrm>
           <a:prstGeom prst="rect">
@@ -11233,7 +10425,7 @@
         </p:nvSpPr>
         <p:spPr>
           <a:xfrm>
-            <a:off x="9522927" y="4788408"/>
+            <a:off x="9522927" y="4708017"/>
             <a:ext cx="2138416" cy="1005840"/>
           </a:xfrm>
           <a:prstGeom prst="roundRect">
@@ -11260,7 +10452,7 @@
         </p:nvSpPr>
         <p:spPr>
           <a:xfrm>
-            <a:off x="9614367" y="4861560"/>
+            <a:off x="9614367" y="4781169"/>
             <a:ext cx="1955536" cy="859536"/>
           </a:xfrm>
           <a:prstGeom prst="rect">
@@ -11859,7 +11051,7 @@
                 <a:ea typeface="Meiryo" pitchFamily="34" charset="-122"/>
                 <a:cs typeface="Meiryo" pitchFamily="34" charset="-120"/>
               </a:rPr>
-              <a:t>API従量課金や月額サブスクリプション費用が発生せず、初期費用のみで社内LAN内の担当者が24時間365日利用可能</a:t>
+              <a:t>API従量課金や月額サブスクリプション費用が発生せず、社内LAN内の担当者が24時間365日利用可能</a:t>
             </a:r>
             <a:endParaRPr lang="en-US" sz="1150" dirty="0"/>
           </a:p>
@@ -11880,7 +11072,7 @@
                 <a:ea typeface="Meiryo" pitchFamily="34" charset="-122"/>
                 <a:cs typeface="Meiryo" pitchFamily="34" charset="-120"/>
               </a:rPr>
-              <a:t>電気代（高負荷時約300〜600W）と年間保守（オプション）を除き、長期運用のTCOを抑制</a:t>
+              <a:t>利用量が増えても追加費用が発生しないため、長期運用のTCOを抑制</a:t>
             </a:r>
             <a:endParaRPr lang="en-US" sz="1150" dirty="0"/>
           </a:p>
